--- a/陶造我生命.pptx
+++ b/陶造我生命.pptx
@@ -165,10 +165,9 @@
           <a:lstStyle/>
           <a:p>
             <a:r>
-              <a:rPr lang="zh-TW" altLang="en-US" smtClean="0"/>
+              <a:rPr lang="zh-TW" altLang="en-US"/>
               <a:t>按一下以編輯母片標題樣式</a:t>
             </a:r>
-            <a:endParaRPr lang="zh-TW" altLang="en-US"/>
           </a:p>
         </p:txBody>
       </p:sp>
@@ -284,10 +283,9 @@
           </a:lstStyle>
           <a:p>
             <a:r>
-              <a:rPr lang="zh-TW" altLang="en-US" smtClean="0"/>
+              <a:rPr lang="zh-TW" altLang="en-US"/>
               <a:t>按一下以編輯母片副標題樣式</a:t>
             </a:r>
-            <a:endParaRPr lang="zh-TW" altLang="en-US"/>
           </a:p>
         </p:txBody>
       </p:sp>
@@ -308,7 +306,7 @@
           <a:p>
             <a:fld id="{2BC5F11A-4D25-467B-A1B9-57C605ED8C65}" type="datetimeFigureOut">
               <a:rPr lang="zh-TW" altLang="en-US" smtClean="0"/>
-              <a:t>2023/8/26</a:t>
+              <a:t>2025/8/9</a:t>
             </a:fld>
             <a:endParaRPr lang="zh-TW" altLang="en-US"/>
           </a:p>
@@ -397,10 +395,9 @@
           <a:lstStyle/>
           <a:p>
             <a:r>
-              <a:rPr lang="zh-TW" altLang="en-US" smtClean="0"/>
+              <a:rPr lang="zh-TW" altLang="en-US"/>
               <a:t>按一下以編輯母片標題樣式</a:t>
             </a:r>
-            <a:endParaRPr lang="zh-TW" altLang="en-US"/>
           </a:p>
         </p:txBody>
       </p:sp>
@@ -421,38 +418,37 @@
           <a:p>
             <a:pPr lvl="0"/>
             <a:r>
-              <a:rPr lang="zh-TW" altLang="en-US" smtClean="0"/>
+              <a:rPr lang="zh-TW" altLang="en-US"/>
               <a:t>按一下以編輯母片文字樣式</a:t>
             </a:r>
           </a:p>
           <a:p>
             <a:pPr lvl="1"/>
             <a:r>
-              <a:rPr lang="zh-TW" altLang="en-US" smtClean="0"/>
+              <a:rPr lang="zh-TW" altLang="en-US"/>
               <a:t>第二層</a:t>
             </a:r>
           </a:p>
           <a:p>
             <a:pPr lvl="2"/>
             <a:r>
-              <a:rPr lang="zh-TW" altLang="en-US" smtClean="0"/>
+              <a:rPr lang="zh-TW" altLang="en-US"/>
               <a:t>第三層</a:t>
             </a:r>
           </a:p>
           <a:p>
             <a:pPr lvl="3"/>
             <a:r>
-              <a:rPr lang="zh-TW" altLang="en-US" smtClean="0"/>
+              <a:rPr lang="zh-TW" altLang="en-US"/>
               <a:t>第四層</a:t>
             </a:r>
           </a:p>
           <a:p>
             <a:pPr lvl="4"/>
             <a:r>
-              <a:rPr lang="zh-TW" altLang="en-US" smtClean="0"/>
+              <a:rPr lang="zh-TW" altLang="en-US"/>
               <a:t>第五層</a:t>
             </a:r>
-            <a:endParaRPr lang="zh-TW" altLang="en-US"/>
           </a:p>
         </p:txBody>
       </p:sp>
@@ -473,7 +469,7 @@
           <a:p>
             <a:fld id="{2BC5F11A-4D25-467B-A1B9-57C605ED8C65}" type="datetimeFigureOut">
               <a:rPr lang="zh-TW" altLang="en-US" smtClean="0"/>
-              <a:t>2023/8/26</a:t>
+              <a:t>2025/8/9</a:t>
             </a:fld>
             <a:endParaRPr lang="zh-TW" altLang="en-US"/>
           </a:p>
@@ -567,10 +563,9 @@
           <a:lstStyle/>
           <a:p>
             <a:r>
-              <a:rPr lang="zh-TW" altLang="en-US" smtClean="0"/>
+              <a:rPr lang="zh-TW" altLang="en-US"/>
               <a:t>按一下以編輯母片標題樣式</a:t>
             </a:r>
-            <a:endParaRPr lang="zh-TW" altLang="en-US"/>
           </a:p>
         </p:txBody>
       </p:sp>
@@ -596,38 +591,37 @@
           <a:p>
             <a:pPr lvl="0"/>
             <a:r>
-              <a:rPr lang="zh-TW" altLang="en-US" smtClean="0"/>
+              <a:rPr lang="zh-TW" altLang="en-US"/>
               <a:t>按一下以編輯母片文字樣式</a:t>
             </a:r>
           </a:p>
           <a:p>
             <a:pPr lvl="1"/>
             <a:r>
-              <a:rPr lang="zh-TW" altLang="en-US" smtClean="0"/>
+              <a:rPr lang="zh-TW" altLang="en-US"/>
               <a:t>第二層</a:t>
             </a:r>
           </a:p>
           <a:p>
             <a:pPr lvl="2"/>
             <a:r>
-              <a:rPr lang="zh-TW" altLang="en-US" smtClean="0"/>
+              <a:rPr lang="zh-TW" altLang="en-US"/>
               <a:t>第三層</a:t>
             </a:r>
           </a:p>
           <a:p>
             <a:pPr lvl="3"/>
             <a:r>
-              <a:rPr lang="zh-TW" altLang="en-US" smtClean="0"/>
+              <a:rPr lang="zh-TW" altLang="en-US"/>
               <a:t>第四層</a:t>
             </a:r>
           </a:p>
           <a:p>
             <a:pPr lvl="4"/>
             <a:r>
-              <a:rPr lang="zh-TW" altLang="en-US" smtClean="0"/>
+              <a:rPr lang="zh-TW" altLang="en-US"/>
               <a:t>第五層</a:t>
             </a:r>
-            <a:endParaRPr lang="zh-TW" altLang="en-US"/>
           </a:p>
         </p:txBody>
       </p:sp>
@@ -648,7 +642,7 @@
           <a:p>
             <a:fld id="{2BC5F11A-4D25-467B-A1B9-57C605ED8C65}" type="datetimeFigureOut">
               <a:rPr lang="zh-TW" altLang="en-US" smtClean="0"/>
-              <a:t>2023/8/26</a:t>
+              <a:t>2025/8/9</a:t>
             </a:fld>
             <a:endParaRPr lang="zh-TW" altLang="en-US"/>
           </a:p>
@@ -737,10 +731,9 @@
           <a:lstStyle/>
           <a:p>
             <a:r>
-              <a:rPr lang="zh-TW" altLang="en-US" smtClean="0"/>
+              <a:rPr lang="zh-TW" altLang="en-US"/>
               <a:t>按一下以編輯母片標題樣式</a:t>
             </a:r>
-            <a:endParaRPr lang="zh-TW" altLang="en-US"/>
           </a:p>
         </p:txBody>
       </p:sp>
@@ -761,38 +754,37 @@
           <a:p>
             <a:pPr lvl="0"/>
             <a:r>
-              <a:rPr lang="zh-TW" altLang="en-US" smtClean="0"/>
+              <a:rPr lang="zh-TW" altLang="en-US"/>
               <a:t>按一下以編輯母片文字樣式</a:t>
             </a:r>
           </a:p>
           <a:p>
             <a:pPr lvl="1"/>
             <a:r>
-              <a:rPr lang="zh-TW" altLang="en-US" smtClean="0"/>
+              <a:rPr lang="zh-TW" altLang="en-US"/>
               <a:t>第二層</a:t>
             </a:r>
           </a:p>
           <a:p>
             <a:pPr lvl="2"/>
             <a:r>
-              <a:rPr lang="zh-TW" altLang="en-US" smtClean="0"/>
+              <a:rPr lang="zh-TW" altLang="en-US"/>
               <a:t>第三層</a:t>
             </a:r>
           </a:p>
           <a:p>
             <a:pPr lvl="3"/>
             <a:r>
-              <a:rPr lang="zh-TW" altLang="en-US" smtClean="0"/>
+              <a:rPr lang="zh-TW" altLang="en-US"/>
               <a:t>第四層</a:t>
             </a:r>
           </a:p>
           <a:p>
             <a:pPr lvl="4"/>
             <a:r>
-              <a:rPr lang="zh-TW" altLang="en-US" smtClean="0"/>
+              <a:rPr lang="zh-TW" altLang="en-US"/>
               <a:t>第五層</a:t>
             </a:r>
-            <a:endParaRPr lang="zh-TW" altLang="en-US"/>
           </a:p>
         </p:txBody>
       </p:sp>
@@ -813,7 +805,7 @@
           <a:p>
             <a:fld id="{2BC5F11A-4D25-467B-A1B9-57C605ED8C65}" type="datetimeFigureOut">
               <a:rPr lang="zh-TW" altLang="en-US" smtClean="0"/>
-              <a:t>2023/8/26</a:t>
+              <a:t>2025/8/9</a:t>
             </a:fld>
             <a:endParaRPr lang="zh-TW" altLang="en-US"/>
           </a:p>
@@ -911,10 +903,9 @@
           </a:lstStyle>
           <a:p>
             <a:r>
-              <a:rPr lang="zh-TW" altLang="en-US" smtClean="0"/>
+              <a:rPr lang="zh-TW" altLang="en-US"/>
               <a:t>按一下以編輯母片標題樣式</a:t>
             </a:r>
-            <a:endParaRPr lang="zh-TW" altLang="en-US"/>
           </a:p>
         </p:txBody>
       </p:sp>
@@ -1031,7 +1022,7 @@
           <a:p>
             <a:pPr lvl="0"/>
             <a:r>
-              <a:rPr lang="zh-TW" altLang="en-US" smtClean="0"/>
+              <a:rPr lang="zh-TW" altLang="en-US"/>
               <a:t>按一下以編輯母片文字樣式</a:t>
             </a:r>
           </a:p>
@@ -1054,7 +1045,7 @@
           <a:p>
             <a:fld id="{2BC5F11A-4D25-467B-A1B9-57C605ED8C65}" type="datetimeFigureOut">
               <a:rPr lang="zh-TW" altLang="en-US" smtClean="0"/>
-              <a:t>2023/8/26</a:t>
+              <a:t>2025/8/9</a:t>
             </a:fld>
             <a:endParaRPr lang="zh-TW" altLang="en-US"/>
           </a:p>
@@ -1143,10 +1134,9 @@
           <a:lstStyle/>
           <a:p>
             <a:r>
-              <a:rPr lang="zh-TW" altLang="en-US" smtClean="0"/>
+              <a:rPr lang="zh-TW" altLang="en-US"/>
               <a:t>按一下以編輯母片標題樣式</a:t>
             </a:r>
-            <a:endParaRPr lang="zh-TW" altLang="en-US"/>
           </a:p>
         </p:txBody>
       </p:sp>
@@ -1200,38 +1190,37 @@
           <a:p>
             <a:pPr lvl="0"/>
             <a:r>
-              <a:rPr lang="zh-TW" altLang="en-US" smtClean="0"/>
+              <a:rPr lang="zh-TW" altLang="en-US"/>
               <a:t>按一下以編輯母片文字樣式</a:t>
             </a:r>
           </a:p>
           <a:p>
             <a:pPr lvl="1"/>
             <a:r>
-              <a:rPr lang="zh-TW" altLang="en-US" smtClean="0"/>
+              <a:rPr lang="zh-TW" altLang="en-US"/>
               <a:t>第二層</a:t>
             </a:r>
           </a:p>
           <a:p>
             <a:pPr lvl="2"/>
             <a:r>
-              <a:rPr lang="zh-TW" altLang="en-US" smtClean="0"/>
+              <a:rPr lang="zh-TW" altLang="en-US"/>
               <a:t>第三層</a:t>
             </a:r>
           </a:p>
           <a:p>
             <a:pPr lvl="3"/>
             <a:r>
-              <a:rPr lang="zh-TW" altLang="en-US" smtClean="0"/>
+              <a:rPr lang="zh-TW" altLang="en-US"/>
               <a:t>第四層</a:t>
             </a:r>
           </a:p>
           <a:p>
             <a:pPr lvl="4"/>
             <a:r>
-              <a:rPr lang="zh-TW" altLang="en-US" smtClean="0"/>
+              <a:rPr lang="zh-TW" altLang="en-US"/>
               <a:t>第五層</a:t>
             </a:r>
-            <a:endParaRPr lang="zh-TW" altLang="en-US"/>
           </a:p>
         </p:txBody>
       </p:sp>
@@ -1285,38 +1274,37 @@
           <a:p>
             <a:pPr lvl="0"/>
             <a:r>
-              <a:rPr lang="zh-TW" altLang="en-US" smtClean="0"/>
+              <a:rPr lang="zh-TW" altLang="en-US"/>
               <a:t>按一下以編輯母片文字樣式</a:t>
             </a:r>
           </a:p>
           <a:p>
             <a:pPr lvl="1"/>
             <a:r>
-              <a:rPr lang="zh-TW" altLang="en-US" smtClean="0"/>
+              <a:rPr lang="zh-TW" altLang="en-US"/>
               <a:t>第二層</a:t>
             </a:r>
           </a:p>
           <a:p>
             <a:pPr lvl="2"/>
             <a:r>
-              <a:rPr lang="zh-TW" altLang="en-US" smtClean="0"/>
+              <a:rPr lang="zh-TW" altLang="en-US"/>
               <a:t>第三層</a:t>
             </a:r>
           </a:p>
           <a:p>
             <a:pPr lvl="3"/>
             <a:r>
-              <a:rPr lang="zh-TW" altLang="en-US" smtClean="0"/>
+              <a:rPr lang="zh-TW" altLang="en-US"/>
               <a:t>第四層</a:t>
             </a:r>
           </a:p>
           <a:p>
             <a:pPr lvl="4"/>
             <a:r>
-              <a:rPr lang="zh-TW" altLang="en-US" smtClean="0"/>
+              <a:rPr lang="zh-TW" altLang="en-US"/>
               <a:t>第五層</a:t>
             </a:r>
-            <a:endParaRPr lang="zh-TW" altLang="en-US"/>
           </a:p>
         </p:txBody>
       </p:sp>
@@ -1337,7 +1325,7 @@
           <a:p>
             <a:fld id="{2BC5F11A-4D25-467B-A1B9-57C605ED8C65}" type="datetimeFigureOut">
               <a:rPr lang="zh-TW" altLang="en-US" smtClean="0"/>
-              <a:t>2023/8/26</a:t>
+              <a:t>2025/8/9</a:t>
             </a:fld>
             <a:endParaRPr lang="zh-TW" altLang="en-US"/>
           </a:p>
@@ -1430,10 +1418,9 @@
           </a:lstStyle>
           <a:p>
             <a:r>
-              <a:rPr lang="zh-TW" altLang="en-US" smtClean="0"/>
+              <a:rPr lang="zh-TW" altLang="en-US"/>
               <a:t>按一下以編輯母片標題樣式</a:t>
             </a:r>
-            <a:endParaRPr lang="zh-TW" altLang="en-US"/>
           </a:p>
         </p:txBody>
       </p:sp>
@@ -1496,7 +1483,7 @@
           <a:p>
             <a:pPr lvl="0"/>
             <a:r>
-              <a:rPr lang="zh-TW" altLang="en-US" smtClean="0"/>
+              <a:rPr lang="zh-TW" altLang="en-US"/>
               <a:t>按一下以編輯母片文字樣式</a:t>
             </a:r>
           </a:p>
@@ -1552,38 +1539,37 @@
           <a:p>
             <a:pPr lvl="0"/>
             <a:r>
-              <a:rPr lang="zh-TW" altLang="en-US" smtClean="0"/>
+              <a:rPr lang="zh-TW" altLang="en-US"/>
               <a:t>按一下以編輯母片文字樣式</a:t>
             </a:r>
           </a:p>
           <a:p>
             <a:pPr lvl="1"/>
             <a:r>
-              <a:rPr lang="zh-TW" altLang="en-US" smtClean="0"/>
+              <a:rPr lang="zh-TW" altLang="en-US"/>
               <a:t>第二層</a:t>
             </a:r>
           </a:p>
           <a:p>
             <a:pPr lvl="2"/>
             <a:r>
-              <a:rPr lang="zh-TW" altLang="en-US" smtClean="0"/>
+              <a:rPr lang="zh-TW" altLang="en-US"/>
               <a:t>第三層</a:t>
             </a:r>
           </a:p>
           <a:p>
             <a:pPr lvl="3"/>
             <a:r>
-              <a:rPr lang="zh-TW" altLang="en-US" smtClean="0"/>
+              <a:rPr lang="zh-TW" altLang="en-US"/>
               <a:t>第四層</a:t>
             </a:r>
           </a:p>
           <a:p>
             <a:pPr lvl="4"/>
             <a:r>
-              <a:rPr lang="zh-TW" altLang="en-US" smtClean="0"/>
+              <a:rPr lang="zh-TW" altLang="en-US"/>
               <a:t>第五層</a:t>
             </a:r>
-            <a:endParaRPr lang="zh-TW" altLang="en-US"/>
           </a:p>
         </p:txBody>
       </p:sp>
@@ -1646,7 +1632,7 @@
           <a:p>
             <a:pPr lvl="0"/>
             <a:r>
-              <a:rPr lang="zh-TW" altLang="en-US" smtClean="0"/>
+              <a:rPr lang="zh-TW" altLang="en-US"/>
               <a:t>按一下以編輯母片文字樣式</a:t>
             </a:r>
           </a:p>
@@ -1702,38 +1688,37 @@
           <a:p>
             <a:pPr lvl="0"/>
             <a:r>
-              <a:rPr lang="zh-TW" altLang="en-US" smtClean="0"/>
+              <a:rPr lang="zh-TW" altLang="en-US"/>
               <a:t>按一下以編輯母片文字樣式</a:t>
             </a:r>
           </a:p>
           <a:p>
             <a:pPr lvl="1"/>
             <a:r>
-              <a:rPr lang="zh-TW" altLang="en-US" smtClean="0"/>
+              <a:rPr lang="zh-TW" altLang="en-US"/>
               <a:t>第二層</a:t>
             </a:r>
           </a:p>
           <a:p>
             <a:pPr lvl="2"/>
             <a:r>
-              <a:rPr lang="zh-TW" altLang="en-US" smtClean="0"/>
+              <a:rPr lang="zh-TW" altLang="en-US"/>
               <a:t>第三層</a:t>
             </a:r>
           </a:p>
           <a:p>
             <a:pPr lvl="3"/>
             <a:r>
-              <a:rPr lang="zh-TW" altLang="en-US" smtClean="0"/>
+              <a:rPr lang="zh-TW" altLang="en-US"/>
               <a:t>第四層</a:t>
             </a:r>
           </a:p>
           <a:p>
             <a:pPr lvl="4"/>
             <a:r>
-              <a:rPr lang="zh-TW" altLang="en-US" smtClean="0"/>
+              <a:rPr lang="zh-TW" altLang="en-US"/>
               <a:t>第五層</a:t>
             </a:r>
-            <a:endParaRPr lang="zh-TW" altLang="en-US"/>
           </a:p>
         </p:txBody>
       </p:sp>
@@ -1754,7 +1739,7 @@
           <a:p>
             <a:fld id="{2BC5F11A-4D25-467B-A1B9-57C605ED8C65}" type="datetimeFigureOut">
               <a:rPr lang="zh-TW" altLang="en-US" smtClean="0"/>
-              <a:t>2023/8/26</a:t>
+              <a:t>2025/8/9</a:t>
             </a:fld>
             <a:endParaRPr lang="zh-TW" altLang="en-US"/>
           </a:p>
@@ -1843,10 +1828,9 @@
           <a:lstStyle/>
           <a:p>
             <a:r>
-              <a:rPr lang="zh-TW" altLang="en-US" smtClean="0"/>
+              <a:rPr lang="zh-TW" altLang="en-US"/>
               <a:t>按一下以編輯母片標題樣式</a:t>
             </a:r>
-            <a:endParaRPr lang="zh-TW" altLang="en-US"/>
           </a:p>
         </p:txBody>
       </p:sp>
@@ -1867,7 +1851,7 @@
           <a:p>
             <a:fld id="{2BC5F11A-4D25-467B-A1B9-57C605ED8C65}" type="datetimeFigureOut">
               <a:rPr lang="zh-TW" altLang="en-US" smtClean="0"/>
-              <a:t>2023/8/26</a:t>
+              <a:t>2025/8/9</a:t>
             </a:fld>
             <a:endParaRPr lang="zh-TW" altLang="en-US"/>
           </a:p>
@@ -1957,7 +1941,7 @@
           <a:p>
             <a:fld id="{2BC5F11A-4D25-467B-A1B9-57C605ED8C65}" type="datetimeFigureOut">
               <a:rPr lang="zh-TW" altLang="en-US" smtClean="0"/>
-              <a:t>2023/8/26</a:t>
+              <a:t>2025/8/9</a:t>
             </a:fld>
             <a:endParaRPr lang="zh-TW" altLang="en-US"/>
           </a:p>
@@ -2055,10 +2039,9 @@
           </a:lstStyle>
           <a:p>
             <a:r>
-              <a:rPr lang="zh-TW" altLang="en-US" smtClean="0"/>
+              <a:rPr lang="zh-TW" altLang="en-US"/>
               <a:t>按一下以編輯母片標題樣式</a:t>
             </a:r>
-            <a:endParaRPr lang="zh-TW" altLang="en-US"/>
           </a:p>
         </p:txBody>
       </p:sp>
@@ -2112,38 +2095,37 @@
           <a:p>
             <a:pPr lvl="0"/>
             <a:r>
-              <a:rPr lang="zh-TW" altLang="en-US" smtClean="0"/>
+              <a:rPr lang="zh-TW" altLang="en-US"/>
               <a:t>按一下以編輯母片文字樣式</a:t>
             </a:r>
           </a:p>
           <a:p>
             <a:pPr lvl="1"/>
             <a:r>
-              <a:rPr lang="zh-TW" altLang="en-US" smtClean="0"/>
+              <a:rPr lang="zh-TW" altLang="en-US"/>
               <a:t>第二層</a:t>
             </a:r>
           </a:p>
           <a:p>
             <a:pPr lvl="2"/>
             <a:r>
-              <a:rPr lang="zh-TW" altLang="en-US" smtClean="0"/>
+              <a:rPr lang="zh-TW" altLang="en-US"/>
               <a:t>第三層</a:t>
             </a:r>
           </a:p>
           <a:p>
             <a:pPr lvl="3"/>
             <a:r>
-              <a:rPr lang="zh-TW" altLang="en-US" smtClean="0"/>
+              <a:rPr lang="zh-TW" altLang="en-US"/>
               <a:t>第四層</a:t>
             </a:r>
           </a:p>
           <a:p>
             <a:pPr lvl="4"/>
             <a:r>
-              <a:rPr lang="zh-TW" altLang="en-US" smtClean="0"/>
+              <a:rPr lang="zh-TW" altLang="en-US"/>
               <a:t>第五層</a:t>
             </a:r>
-            <a:endParaRPr lang="zh-TW" altLang="en-US"/>
           </a:p>
         </p:txBody>
       </p:sp>
@@ -2206,7 +2188,7 @@
           <a:p>
             <a:pPr lvl="0"/>
             <a:r>
-              <a:rPr lang="zh-TW" altLang="en-US" smtClean="0"/>
+              <a:rPr lang="zh-TW" altLang="en-US"/>
               <a:t>按一下以編輯母片文字樣式</a:t>
             </a:r>
           </a:p>
@@ -2229,7 +2211,7 @@
           <a:p>
             <a:fld id="{2BC5F11A-4D25-467B-A1B9-57C605ED8C65}" type="datetimeFigureOut">
               <a:rPr lang="zh-TW" altLang="en-US" smtClean="0"/>
-              <a:t>2023/8/26</a:t>
+              <a:t>2025/8/9</a:t>
             </a:fld>
             <a:endParaRPr lang="zh-TW" altLang="en-US"/>
           </a:p>
@@ -2327,10 +2309,9 @@
           </a:lstStyle>
           <a:p>
             <a:r>
-              <a:rPr lang="zh-TW" altLang="en-US" smtClean="0"/>
+              <a:rPr lang="zh-TW" altLang="en-US"/>
               <a:t>按一下以編輯母片標題樣式</a:t>
             </a:r>
-            <a:endParaRPr lang="zh-TW" altLang="en-US"/>
           </a:p>
         </p:txBody>
       </p:sp>
@@ -2392,10 +2373,9 @@
           </a:lstStyle>
           <a:p>
             <a:r>
-              <a:rPr lang="zh-TW" altLang="en-US" smtClean="0"/>
+              <a:rPr lang="zh-TW" altLang="en-US"/>
               <a:t>按一下圖示以新增圖片</a:t>
             </a:r>
-            <a:endParaRPr lang="zh-TW" altLang="en-US"/>
           </a:p>
         </p:txBody>
       </p:sp>
@@ -2458,7 +2438,7 @@
           <a:p>
             <a:pPr lvl="0"/>
             <a:r>
-              <a:rPr lang="zh-TW" altLang="en-US" smtClean="0"/>
+              <a:rPr lang="zh-TW" altLang="en-US"/>
               <a:t>按一下以編輯母片文字樣式</a:t>
             </a:r>
           </a:p>
@@ -2481,7 +2461,7 @@
           <a:p>
             <a:fld id="{2BC5F11A-4D25-467B-A1B9-57C605ED8C65}" type="datetimeFigureOut">
               <a:rPr lang="zh-TW" altLang="en-US" smtClean="0"/>
-              <a:t>2023/8/26</a:t>
+              <a:t>2025/8/9</a:t>
             </a:fld>
             <a:endParaRPr lang="zh-TW" altLang="en-US"/>
           </a:p>
@@ -2590,10 +2570,9 @@
           <a:lstStyle/>
           <a:p>
             <a:r>
-              <a:rPr lang="zh-TW" altLang="en-US" smtClean="0"/>
+              <a:rPr lang="zh-TW" altLang="en-US"/>
               <a:t>按一下以編輯母片標題樣式</a:t>
             </a:r>
-            <a:endParaRPr lang="zh-TW" altLang="en-US"/>
           </a:p>
         </p:txBody>
       </p:sp>
@@ -2624,38 +2603,37 @@
           <a:p>
             <a:pPr lvl="0"/>
             <a:r>
-              <a:rPr lang="zh-TW" altLang="en-US" smtClean="0"/>
+              <a:rPr lang="zh-TW" altLang="en-US"/>
               <a:t>按一下以編輯母片文字樣式</a:t>
             </a:r>
           </a:p>
           <a:p>
             <a:pPr lvl="1"/>
             <a:r>
-              <a:rPr lang="zh-TW" altLang="en-US" smtClean="0"/>
+              <a:rPr lang="zh-TW" altLang="en-US"/>
               <a:t>第二層</a:t>
             </a:r>
           </a:p>
           <a:p>
             <a:pPr lvl="2"/>
             <a:r>
-              <a:rPr lang="zh-TW" altLang="en-US" smtClean="0"/>
+              <a:rPr lang="zh-TW" altLang="en-US"/>
               <a:t>第三層</a:t>
             </a:r>
           </a:p>
           <a:p>
             <a:pPr lvl="3"/>
             <a:r>
-              <a:rPr lang="zh-TW" altLang="en-US" smtClean="0"/>
+              <a:rPr lang="zh-TW" altLang="en-US"/>
               <a:t>第四層</a:t>
             </a:r>
           </a:p>
           <a:p>
             <a:pPr lvl="4"/>
             <a:r>
-              <a:rPr lang="zh-TW" altLang="en-US" smtClean="0"/>
+              <a:rPr lang="zh-TW" altLang="en-US"/>
               <a:t>第五層</a:t>
             </a:r>
-            <a:endParaRPr lang="zh-TW" altLang="en-US"/>
           </a:p>
         </p:txBody>
       </p:sp>
@@ -2694,7 +2672,7 @@
           <a:p>
             <a:fld id="{2BC5F11A-4D25-467B-A1B9-57C605ED8C65}" type="datetimeFigureOut">
               <a:rPr lang="zh-TW" altLang="en-US" smtClean="0"/>
-              <a:t>2023/8/26</a:t>
+              <a:t>2025/8/9</a:t>
             </a:fld>
             <a:endParaRPr lang="zh-TW" altLang="en-US"/>
           </a:p>
@@ -3101,24 +3079,7 @@
                 <a:latin typeface="微軟正黑體" pitchFamily="34" charset="-120"/>
                 <a:ea typeface="微軟正黑體" pitchFamily="34" charset="-120"/>
               </a:rPr>
-              <a:t>陶</a:t>
-            </a:r>
-            <a:r>
-              <a:rPr lang="zh-TW" altLang="en-US" sz="7200" b="1" i="1" dirty="0">
-                <a:solidFill>
-                  <a:srgbClr val="000066"/>
-                </a:solidFill>
-                <a:effectLst>
-                  <a:outerShdw blurRad="38100" dist="38100" dir="2700000" algn="tl">
-                    <a:srgbClr val="000000">
-                      <a:alpha val="43137"/>
-                    </a:srgbClr>
-                  </a:outerShdw>
-                </a:effectLst>
-                <a:latin typeface="微軟正黑體" pitchFamily="34" charset="-120"/>
-                <a:ea typeface="微軟正黑體" pitchFamily="34" charset="-120"/>
-              </a:rPr>
-              <a:t>造我生命</a:t>
+              <a:t>陶造我生命</a:t>
             </a:r>
           </a:p>
         </p:txBody>
@@ -3261,7 +3222,7 @@
                 <a:latin typeface="Microsoft JhengHei" panose="020B0604030504040204" pitchFamily="34" charset="-120"/>
                 <a:ea typeface="Microsoft JhengHei" panose="020B0604030504040204" pitchFamily="34" charset="-120"/>
               </a:rPr>
-              <a:t>正</a:t>
+              <a:t>正歌</a:t>
             </a:r>
             <a:r>
               <a:rPr lang="en-US" sz="3733" b="1" dirty="0">
@@ -3369,13 +3330,6 @@
               </a:rPr>
               <a:t>剔出污穢  願能成聖</a:t>
             </a:r>
-            <a:endParaRPr lang="zh-TW" altLang="en-US" sz="6400" b="1" dirty="0">
-              <a:solidFill>
-                <a:srgbClr val="000066"/>
-              </a:solidFill>
-              <a:latin typeface="微軟正黑體" pitchFamily="34" charset="-120"/>
-              <a:ea typeface="微軟正黑體" pitchFamily="34" charset="-120"/>
-            </a:endParaRPr>
           </a:p>
         </p:txBody>
       </p:sp>
@@ -3420,7 +3374,7 @@
                 <a:latin typeface="Microsoft JhengHei" panose="020B0604030504040204" pitchFamily="34" charset="-120"/>
                 <a:ea typeface="Microsoft JhengHei" panose="020B0604030504040204" pitchFamily="34" charset="-120"/>
               </a:rPr>
-              <a:t>正</a:t>
+              <a:t>正歌</a:t>
             </a:r>
             <a:r>
               <a:rPr lang="en-US" sz="3733" b="1" dirty="0">
@@ -3579,7 +3533,7 @@
                 <a:latin typeface="Microsoft JhengHei" panose="020B0604030504040204" pitchFamily="34" charset="-120"/>
                 <a:ea typeface="Microsoft JhengHei" panose="020B0604030504040204" pitchFamily="34" charset="-120"/>
               </a:rPr>
-              <a:t>副</a:t>
+              <a:t>副歌</a:t>
             </a:r>
             <a:r>
               <a:rPr lang="en-US" sz="3733" b="1" dirty="0">
@@ -3707,13 +3661,6 @@
               </a:rPr>
               <a:t>彰顯美善靈性</a:t>
             </a:r>
-            <a:endParaRPr lang="zh-TW" altLang="en-US" sz="6400" b="1" dirty="0">
-              <a:solidFill>
-                <a:srgbClr val="000066"/>
-              </a:solidFill>
-              <a:latin typeface="微軟正黑體" pitchFamily="34" charset="-120"/>
-              <a:ea typeface="微軟正黑體" pitchFamily="34" charset="-120"/>
-            </a:endParaRPr>
           </a:p>
         </p:txBody>
       </p:sp>
@@ -3758,7 +3705,7 @@
                 <a:latin typeface="Microsoft JhengHei" panose="020B0604030504040204" pitchFamily="34" charset="-120"/>
                 <a:ea typeface="Microsoft JhengHei" panose="020B0604030504040204" pitchFamily="34" charset="-120"/>
               </a:rPr>
-              <a:t>副</a:t>
+              <a:t>副歌</a:t>
             </a:r>
             <a:r>
               <a:rPr lang="en-US" sz="3733" b="1" dirty="0">
